--- a/figures/dbond_gt_architecture_v5.pptx
+++ b/figures/dbond_gt_architecture_v5.pptx
@@ -2515,7 +2515,7 @@
                 <a:ea typeface="Segoe UI" pitchFamily="34" charset="-122"/>
                 <a:cs typeface="Segoe UI" pitchFamily="34" charset="-120"/>
               </a:rPr>
-              <a:t>(γ, β) ∈ ℝ²⁵⁶</a:t>
+              <a:t>γ, β ∈ ℝ²⁵⁶ (each)</a:t>
             </a:r>
             <a:endParaRPr lang="en-US" sz="900" dirty="0"/>
           </a:p>
@@ -2777,6 +2777,30 @@
           <p:nvPr/>
         </p:nvSpPr>
         <p:spPr>
+          <a:xfrm flipV="1">
+            <a:off x="1682496" y="3017520"/>
+            <a:ext cx="960120" cy="1088136"/>
+          </a:xfrm>
+          <a:prstGeom prst="line">
+            <a:avLst/>
+          </a:prstGeom>
+          <a:noFill/>
+          <a:ln w="25400">
+            <a:solidFill>
+              <a:srgbClr val="0D9488"/>
+            </a:solidFill>
+            <a:prstDash val="solid"/>
+            <a:tailEnd type="triangle"/>
+          </a:ln>
+        </p:spPr>
+      </p:sp>
+      <p:sp>
+        <p:nvSpPr>
+          <p:cNvPr id="65" name="Shape 63"/>
+          <p:cNvSpPr/>
+          <p:nvPr/>
+        </p:nvSpPr>
+        <p:spPr>
           <a:xfrm>
             <a:off x="8595360" y="2148840"/>
             <a:ext cx="1828800" cy="2286000"/>
@@ -2799,7 +2823,7 @@
       </p:sp>
       <p:sp>
         <p:nvSpPr>
-          <p:cNvPr id="65" name="Text 63"/>
+          <p:cNvPr id="66" name="Text 64"/>
           <p:cNvSpPr/>
           <p:nvPr/>
         </p:nvSpPr>
@@ -2838,7 +2862,7 @@
       </p:sp>
       <p:sp>
         <p:nvSpPr>
-          <p:cNvPr id="66" name="Shape 64"/>
+          <p:cNvPr id="67" name="Shape 65"/>
           <p:cNvSpPr/>
           <p:nvPr/>
         </p:nvSpPr>
@@ -2870,7 +2894,7 @@
       </p:sp>
       <p:sp>
         <p:nvSpPr>
-          <p:cNvPr id="67" name="Shape 65"/>
+          <p:cNvPr id="68" name="Shape 66"/>
           <p:cNvSpPr/>
           <p:nvPr/>
         </p:nvSpPr>
@@ -2895,7 +2919,7 @@
       </p:sp>
       <p:sp>
         <p:nvSpPr>
-          <p:cNvPr id="68" name="Shape 66"/>
+          <p:cNvPr id="69" name="Shape 67"/>
           <p:cNvSpPr/>
           <p:nvPr/>
         </p:nvSpPr>
@@ -2920,7 +2944,7 @@
       </p:sp>
       <p:sp>
         <p:nvSpPr>
-          <p:cNvPr id="69" name="Text 67"/>
+          <p:cNvPr id="70" name="Text 68"/>
           <p:cNvSpPr/>
           <p:nvPr/>
         </p:nvSpPr>
@@ -2959,7 +2983,7 @@
       </p:sp>
       <p:sp>
         <p:nvSpPr>
-          <p:cNvPr id="70" name="Shape 68"/>
+          <p:cNvPr id="71" name="Shape 69"/>
           <p:cNvSpPr/>
           <p:nvPr/>
         </p:nvSpPr>
@@ -2983,7 +3007,7 @@
       </p:sp>
       <p:sp>
         <p:nvSpPr>
-          <p:cNvPr id="71" name="Shape 69"/>
+          <p:cNvPr id="72" name="Shape 70"/>
           <p:cNvSpPr/>
           <p:nvPr/>
         </p:nvSpPr>
@@ -3015,7 +3039,7 @@
       </p:sp>
       <p:sp>
         <p:nvSpPr>
-          <p:cNvPr id="72" name="Shape 70"/>
+          <p:cNvPr id="73" name="Shape 71"/>
           <p:cNvSpPr/>
           <p:nvPr/>
         </p:nvSpPr>
@@ -3040,7 +3064,7 @@
       </p:sp>
       <p:sp>
         <p:nvSpPr>
-          <p:cNvPr id="73" name="Shape 71"/>
+          <p:cNvPr id="74" name="Shape 72"/>
           <p:cNvSpPr/>
           <p:nvPr/>
         </p:nvSpPr>
@@ -3065,7 +3089,7 @@
       </p:sp>
       <p:sp>
         <p:nvSpPr>
-          <p:cNvPr id="74" name="Text 72"/>
+          <p:cNvPr id="75" name="Text 73"/>
           <p:cNvSpPr/>
           <p:nvPr/>
         </p:nvSpPr>
@@ -3104,7 +3128,7 @@
       </p:sp>
       <p:sp>
         <p:nvSpPr>
-          <p:cNvPr id="75" name="Shape 73"/>
+          <p:cNvPr id="76" name="Shape 74"/>
           <p:cNvSpPr/>
           <p:nvPr/>
         </p:nvSpPr>
@@ -3128,7 +3152,7 @@
       </p:sp>
       <p:sp>
         <p:nvSpPr>
-          <p:cNvPr id="76" name="Shape 74"/>
+          <p:cNvPr id="77" name="Shape 75"/>
           <p:cNvSpPr/>
           <p:nvPr/>
         </p:nvSpPr>
@@ -3160,7 +3184,7 @@
       </p:sp>
       <p:sp>
         <p:nvSpPr>
-          <p:cNvPr id="77" name="Shape 75"/>
+          <p:cNvPr id="78" name="Shape 76"/>
           <p:cNvSpPr/>
           <p:nvPr/>
         </p:nvSpPr>
@@ -3185,7 +3209,7 @@
       </p:sp>
       <p:sp>
         <p:nvSpPr>
-          <p:cNvPr id="78" name="Shape 76"/>
+          <p:cNvPr id="79" name="Shape 77"/>
           <p:cNvSpPr/>
           <p:nvPr/>
         </p:nvSpPr>
@@ -3210,7 +3234,7 @@
       </p:sp>
       <p:sp>
         <p:nvSpPr>
-          <p:cNvPr id="79" name="Text 77"/>
+          <p:cNvPr id="80" name="Text 78"/>
           <p:cNvSpPr/>
           <p:nvPr/>
         </p:nvSpPr>
@@ -3249,7 +3273,7 @@
       </p:sp>
       <p:sp>
         <p:nvSpPr>
-          <p:cNvPr id="80" name="Text 78"/>
+          <p:cNvPr id="81" name="Text 79"/>
           <p:cNvSpPr/>
           <p:nvPr/>
         </p:nvSpPr>
@@ -3288,7 +3312,7 @@
       </p:sp>
       <p:sp>
         <p:nvSpPr>
-          <p:cNvPr id="81" name="Shape 79"/>
+          <p:cNvPr id="82" name="Shape 80"/>
           <p:cNvSpPr/>
           <p:nvPr/>
         </p:nvSpPr>
@@ -3312,14 +3336,14 @@
       </p:sp>
       <p:sp>
         <p:nvSpPr>
-          <p:cNvPr id="82" name="Shape 80"/>
-          <p:cNvSpPr/>
-          <p:nvPr/>
-        </p:nvSpPr>
-        <p:spPr>
-          <a:xfrm>
-            <a:off x="10789920" y="4339742"/>
-            <a:ext cx="128016" cy="186538"/>
+          <p:cNvPr id="83" name="Shape 81"/>
+          <p:cNvSpPr/>
+          <p:nvPr/>
+        </p:nvSpPr>
+        <p:spPr>
+          <a:xfrm>
+            <a:off x="10789920" y="4044391"/>
+            <a:ext cx="128016" cy="481889"/>
           </a:xfrm>
           <a:prstGeom prst="roundRect">
             <a:avLst>
@@ -3327,7 +3351,7 @@
             </a:avLst>
           </a:prstGeom>
           <a:solidFill>
-            <a:srgbClr val="0D9488"/>
+            <a:srgbClr val="D97706"/>
           </a:solidFill>
           <a:ln/>
           <a:effectLst>
@@ -3341,14 +3365,14 @@
       </p:sp>
       <p:sp>
         <p:nvSpPr>
-          <p:cNvPr id="83" name="Shape 81"/>
-          <p:cNvSpPr/>
-          <p:nvPr/>
-        </p:nvSpPr>
-        <p:spPr>
-          <a:xfrm>
-            <a:off x="10963656" y="4075481"/>
-            <a:ext cx="128016" cy="450799"/>
+          <p:cNvPr id="84" name="Shape 82"/>
+          <p:cNvSpPr/>
+          <p:nvPr/>
+        </p:nvSpPr>
+        <p:spPr>
+          <a:xfrm>
+            <a:off x="10963656" y="4254246"/>
+            <a:ext cx="128016" cy="272034"/>
           </a:xfrm>
           <a:prstGeom prst="roundRect">
             <a:avLst>
@@ -3356,7 +3380,7 @@
             </a:avLst>
           </a:prstGeom>
           <a:solidFill>
-            <a:srgbClr val="D97706"/>
+            <a:srgbClr val="0D9488"/>
           </a:solidFill>
           <a:ln/>
           <a:effectLst>
@@ -3370,14 +3394,14 @@
       </p:sp>
       <p:sp>
         <p:nvSpPr>
-          <p:cNvPr id="84" name="Shape 82"/>
-          <p:cNvSpPr/>
-          <p:nvPr/>
-        </p:nvSpPr>
-        <p:spPr>
-          <a:xfrm>
-            <a:off x="11137392" y="4254246"/>
-            <a:ext cx="128016" cy="272034"/>
+          <p:cNvPr id="85" name="Shape 83"/>
+          <p:cNvSpPr/>
+          <p:nvPr/>
+        </p:nvSpPr>
+        <p:spPr>
+          <a:xfrm>
+            <a:off x="11137392" y="3920033"/>
+            <a:ext cx="128016" cy="606247"/>
           </a:xfrm>
           <a:prstGeom prst="roundRect">
             <a:avLst>
@@ -3385,7 +3409,7 @@
             </a:avLst>
           </a:prstGeom>
           <a:solidFill>
-            <a:srgbClr val="0D9488"/>
+            <a:srgbClr val="D97706"/>
           </a:solidFill>
           <a:ln/>
           <a:effectLst>
@@ -3399,123 +3423,7 @@
       </p:sp>
       <p:sp>
         <p:nvSpPr>
-          <p:cNvPr id="85" name="Shape 83"/>
-          <p:cNvSpPr/>
-          <p:nvPr/>
-        </p:nvSpPr>
-        <p:spPr>
-          <a:xfrm>
-            <a:off x="11311128" y="3920033"/>
-            <a:ext cx="128016" cy="606247"/>
-          </a:xfrm>
-          <a:prstGeom prst="roundRect">
-            <a:avLst>
-              <a:gd name="adj" fmla="val 10714"/>
-            </a:avLst>
-          </a:prstGeom>
-          <a:solidFill>
-            <a:srgbClr val="D97706"/>
-          </a:solidFill>
-          <a:ln/>
-          <a:effectLst>
-            <a:outerShdw sx="100000" sy="100000" kx="0" ky="0" algn="bl" rotWithShape="0" blurRad="38100" dist="12700" dir="5400000">
-              <a:srgbClr val="94A3B8">
-                <a:alpha val="25000"/>
-              </a:srgbClr>
-            </a:outerShdw>
-          </a:effectLst>
-        </p:spPr>
-      </p:sp>
-      <p:sp>
-        <p:nvSpPr>
           <p:cNvPr id="86" name="Shape 84"/>
-          <p:cNvSpPr/>
-          <p:nvPr/>
-        </p:nvSpPr>
-        <p:spPr>
-          <a:xfrm>
-            <a:off x="11484864" y="4199839"/>
-            <a:ext cx="128016" cy="326441"/>
-          </a:xfrm>
-          <a:prstGeom prst="roundRect">
-            <a:avLst>
-              <a:gd name="adj" fmla="val 10714"/>
-            </a:avLst>
-          </a:prstGeom>
-          <a:solidFill>
-            <a:srgbClr val="0D9488"/>
-          </a:solidFill>
-          <a:ln/>
-          <a:effectLst>
-            <a:outerShdw sx="100000" sy="100000" kx="0" ky="0" algn="bl" rotWithShape="0" blurRad="38100" dist="12700" dir="5400000">
-              <a:srgbClr val="94A3B8">
-                <a:alpha val="25000"/>
-              </a:srgbClr>
-            </a:outerShdw>
-          </a:effectLst>
-        </p:spPr>
-      </p:sp>
-      <p:sp>
-        <p:nvSpPr>
-          <p:cNvPr id="87" name="Shape 85"/>
-          <p:cNvSpPr/>
-          <p:nvPr/>
-        </p:nvSpPr>
-        <p:spPr>
-          <a:xfrm>
-            <a:off x="11658600" y="4013302"/>
-            <a:ext cx="128016" cy="512978"/>
-          </a:xfrm>
-          <a:prstGeom prst="roundRect">
-            <a:avLst>
-              <a:gd name="adj" fmla="val 10714"/>
-            </a:avLst>
-          </a:prstGeom>
-          <a:solidFill>
-            <a:srgbClr val="D97706"/>
-          </a:solidFill>
-          <a:ln/>
-          <a:effectLst>
-            <a:outerShdw sx="100000" sy="100000" kx="0" ky="0" algn="bl" rotWithShape="0" blurRad="38100" dist="12700" dir="5400000">
-              <a:srgbClr val="94A3B8">
-                <a:alpha val="25000"/>
-              </a:srgbClr>
-            </a:outerShdw>
-          </a:effectLst>
-        </p:spPr>
-      </p:sp>
-      <p:sp>
-        <p:nvSpPr>
-          <p:cNvPr id="88" name="Shape 86"/>
-          <p:cNvSpPr/>
-          <p:nvPr/>
-        </p:nvSpPr>
-        <p:spPr>
-          <a:xfrm>
-            <a:off x="11832336" y="4293108"/>
-            <a:ext cx="128016" cy="233172"/>
-          </a:xfrm>
-          <a:prstGeom prst="roundRect">
-            <a:avLst>
-              <a:gd name="adj" fmla="val 10714"/>
-            </a:avLst>
-          </a:prstGeom>
-          <a:solidFill>
-            <a:srgbClr val="0D9488"/>
-          </a:solidFill>
-          <a:ln/>
-          <a:effectLst>
-            <a:outerShdw sx="100000" sy="100000" kx="0" ky="0" algn="bl" rotWithShape="0" blurRad="38100" dist="12700" dir="5400000">
-              <a:srgbClr val="94A3B8">
-                <a:alpha val="25000"/>
-              </a:srgbClr>
-            </a:outerShdw>
-          </a:effectLst>
-        </p:spPr>
-      </p:sp>
-      <p:sp>
-        <p:nvSpPr>
-          <p:cNvPr id="89" name="Shape 87"/>
           <p:cNvSpPr/>
           <p:nvPr/>
         </p:nvSpPr>
@@ -3538,7 +3446,7 @@
       </p:sp>
       <p:sp>
         <p:nvSpPr>
-          <p:cNvPr id="90" name="Text 88"/>
+          <p:cNvPr id="87" name="Text 85"/>
           <p:cNvSpPr/>
           <p:nvPr/>
         </p:nvSpPr>
